--- a/assets/RustCPG_Detect_Presentation .pptx
+++ b/assets/RustCPG_Detect_Presentation .pptx
@@ -57,7 +57,6 @@
 <p1510:revInfo xmlns:a="http://schemas.openxmlformats.org/drawingml/2006/main" xmlns:r="http://schemas.openxmlformats.org/officeDocument/2006/relationships" xmlns:p1510="http://schemas.microsoft.com/office/powerpoint/2015/10/main">
   <p1510:revLst>
     <p1510:client id="{11AC3E6B-75A9-33FC-08EF-0CEF05AD7E60}" v="1114" dt="2026-03-05T18:27:43.015"/>
-    <p1510:client id="{83FF5158-7782-247D-D7E1-8211445562F5}" v="1265" dt="2026-03-05T17:22:21.333"/>
     <p1510:client id="{E61B090E-1551-7689-5FEC-DDF630F0473F}" v="1355" dt="2026-03-05T18:33:16.716"/>
   </p1510:revLst>
 </p1510:revInfo>
@@ -672,7 +671,7 @@
           </a:lstStyle>
           <a:p>
             <a:fld id="{E37D0B7D-0AC4-4AD8-91EF-97F898848BCA}" type="datetimeFigureOut">
-              <a:t>3/5/2026</a:t>
+              <a:t>3/6/2026</a:t>
             </a:fld>
             <a:endParaRPr lang="en-US"/>
           </a:p>
@@ -1003,7 +1002,7 @@
           <a:p>
             <a:fld id="{F7021451-1387-4CA6-816F-3879F97B5CBC}" type="slidenum">
               <a:rPr lang="en-US"/>
-              <a:t>14</a:t>
+              <a:t>13</a:t>
             </a:fld>
             <a:endParaRPr lang="en-US"/>
           </a:p>
@@ -1167,7 +1166,7 @@
           <a:p>
             <a:fld id="{1D8BD707-D9CF-40AE-B4C6-C98DA3205C09}" type="datetimeFigureOut">
               <a:rPr lang="en-US"/>
-              <a:t>3/5/2026</a:t>
+              <a:t>3/6/2026</a:t>
             </a:fld>
             <a:endParaRPr lang="en-US"/>
           </a:p>
@@ -1344,7 +1343,7 @@
           <a:p>
             <a:fld id="{1D8BD707-D9CF-40AE-B4C6-C98DA3205C09}" type="datetimeFigureOut">
               <a:rPr lang="en-US"/>
-              <a:t>3/5/2026</a:t>
+              <a:t>3/6/2026</a:t>
             </a:fld>
             <a:endParaRPr lang="en-US"/>
           </a:p>
@@ -1564,7 +1563,7 @@
           <a:p>
             <a:fld id="{1D8BD707-D9CF-40AE-B4C6-C98DA3205C09}" type="datetimeFigureOut">
               <a:rPr lang="en-US"/>
-              <a:t>3/5/2026</a:t>
+              <a:t>3/6/2026</a:t>
             </a:fld>
             <a:endParaRPr lang="en-US"/>
           </a:p>
@@ -1718,7 +1717,7 @@
           <a:p>
             <a:fld id="{1D8BD707-D9CF-40AE-B4C6-C98DA3205C09}" type="datetimeFigureOut">
               <a:rPr lang="en-US"/>
-              <a:t>3/5/2026</a:t>
+              <a:t>3/6/2026</a:t>
             </a:fld>
             <a:endParaRPr lang="en-US"/>
           </a:p>
@@ -1843,7 +1842,7 @@
           <a:p>
             <a:fld id="{1D8BD707-D9CF-40AE-B4C6-C98DA3205C09}" type="datetimeFigureOut">
               <a:rPr lang="en-US"/>
-              <a:t>3/5/2026</a:t>
+              <a:t>3/6/2026</a:t>
             </a:fld>
             <a:endParaRPr lang="en-US"/>
           </a:p>
@@ -2103,7 +2102,7 @@
           <a:p>
             <a:fld id="{1D8BD707-D9CF-40AE-B4C6-C98DA3205C09}" type="datetimeFigureOut">
               <a:rPr lang="en-US"/>
-              <a:t>3/5/2026</a:t>
+              <a:t>3/6/2026</a:t>
             </a:fld>
             <a:endParaRPr lang="en-US"/>
           </a:p>
@@ -2408,7 +2407,7 @@
                 <a:ea typeface="Calibri"/>
                 <a:cs typeface="Times New Roman"/>
               </a:rPr>
-              <a:t>G. Sai Kaushik  - AV.SC.U4CSE23109</a:t>
+              <a:t>G. Sai Kaushik  </a:t>
             </a:r>
           </a:p>
           <a:p>
@@ -2426,29 +2425,7 @@
                 <a:ea typeface="Calibri"/>
                 <a:cs typeface="Times New Roman"/>
               </a:rPr>
-              <a:t>G. </a:t>
-            </a:r>
-            <a:r>
-              <a:rPr lang="en-US" sz="1600" b="1" dirty="0" err="1">
-                <a:solidFill>
-                  <a:schemeClr val="tx1"/>
-                </a:solidFill>
-                <a:latin typeface="Times New Roman"/>
-                <a:ea typeface="Calibri"/>
-                <a:cs typeface="Times New Roman"/>
-              </a:rPr>
-              <a:t>Kaarthikeya</a:t>
-            </a:r>
-            <a:r>
-              <a:rPr lang="en-US" sz="1600" b="1" dirty="0">
-                <a:solidFill>
-                  <a:schemeClr val="tx1"/>
-                </a:solidFill>
-                <a:latin typeface="Times New Roman"/>
-                <a:ea typeface="Calibri"/>
-                <a:cs typeface="Times New Roman"/>
-              </a:rPr>
-              <a:t> Lakshman– AV.SC.U4CSE23118</a:t>
+              <a:t>G. Kaarthikeya Lakshman–</a:t>
             </a:r>
           </a:p>
           <a:p>
@@ -2466,129 +2443,8 @@
                 <a:ea typeface="Calibri"/>
                 <a:cs typeface="Times New Roman"/>
               </a:rPr>
-              <a:t>P.V.S Sai Pranav– AV.SC.U4CSE23136</a:t>
+              <a:t>P.V.S Sai Pranav– </a:t>
             </a:r>
-          </a:p>
-        </p:txBody>
-      </p:sp>
-      <p:sp>
-        <p:nvSpPr>
-          <p:cNvPr id="7" name="object 7"/>
-          <p:cNvSpPr txBox="1"/>
-          <p:nvPr/>
-        </p:nvSpPr>
-        <p:spPr>
-          <a:xfrm>
-            <a:off x="6096000" y="4680732"/>
-            <a:ext cx="6970654" cy="1160574"/>
-          </a:xfrm>
-          <a:prstGeom prst="rect">
-            <a:avLst/>
-          </a:prstGeom>
-        </p:spPr>
-        <p:txBody>
-          <a:bodyPr vert="horz" wrap="square" lIns="0" tIns="13970" rIns="0" bIns="0" rtlCol="0" anchor="t">
-            <a:spAutoFit/>
-          </a:bodyPr>
-          <a:lstStyle/>
-          <a:p>
-            <a:pPr marL="12700">
-              <a:spcBef>
-                <a:spcPts val="110"/>
-              </a:spcBef>
-            </a:pPr>
-            <a:r>
-              <a:rPr lang="en-US" b="1">
-                <a:solidFill>
-                  <a:schemeClr val="tx1"/>
-                </a:solidFill>
-                <a:latin typeface="Times New Roman"/>
-                <a:ea typeface="Calibri"/>
-                <a:cs typeface="Times New Roman"/>
-              </a:rPr>
-              <a:t>Submitted to:</a:t>
-            </a:r>
-          </a:p>
-          <a:p>
-            <a:pPr marL="12700">
-              <a:spcBef>
-                <a:spcPts val="110"/>
-              </a:spcBef>
-            </a:pPr>
-            <a:r>
-              <a:rPr lang="en-US" b="1">
-                <a:solidFill>
-                  <a:schemeClr val="tx1"/>
-                </a:solidFill>
-                <a:latin typeface="Times New Roman"/>
-                <a:ea typeface="Calibri"/>
-                <a:cs typeface="Times New Roman"/>
-              </a:rPr>
-              <a:t>	Dr.</a:t>
-            </a:r>
-            <a:r>
-              <a:rPr lang="en-US" b="1" spc="-50">
-                <a:solidFill>
-                  <a:schemeClr val="tx1"/>
-                </a:solidFill>
-                <a:latin typeface="Times New Roman"/>
-                <a:ea typeface="Calibri"/>
-                <a:cs typeface="Times New Roman"/>
-              </a:rPr>
-              <a:t> K.S.L Prasanna</a:t>
-            </a:r>
-            <a:endParaRPr lang="en-US" b="1">
-              <a:solidFill>
-                <a:schemeClr val="tx1"/>
-              </a:solidFill>
-              <a:latin typeface="Times New Roman"/>
-              <a:ea typeface="Calibri"/>
-              <a:cs typeface="Times New Roman"/>
-            </a:endParaRPr>
-          </a:p>
-          <a:p>
-            <a:pPr marL="12700">
-              <a:spcBef>
-                <a:spcPts val="110"/>
-              </a:spcBef>
-            </a:pPr>
-            <a:r>
-              <a:rPr lang="en-US" b="1" spc="-10">
-                <a:solidFill>
-                  <a:schemeClr val="tx1"/>
-                </a:solidFill>
-                <a:latin typeface="Times New Roman"/>
-                <a:ea typeface="Calibri"/>
-                <a:cs typeface="Times New Roman"/>
-              </a:rPr>
-              <a:t>	Department of Computer Science and Engineering,</a:t>
-            </a:r>
-          </a:p>
-          <a:p>
-            <a:pPr marL="12700">
-              <a:spcBef>
-                <a:spcPts val="110"/>
-              </a:spcBef>
-            </a:pPr>
-            <a:r>
-              <a:rPr lang="en-US" b="1" spc="-10">
-                <a:solidFill>
-                  <a:schemeClr val="tx1"/>
-                </a:solidFill>
-                <a:latin typeface="Times New Roman"/>
-                <a:ea typeface="Calibri"/>
-                <a:cs typeface="Times New Roman"/>
-              </a:rPr>
-              <a:t>	School of Computing, Amaravati Campus</a:t>
-            </a:r>
-            <a:endParaRPr lang="en-US" b="1">
-              <a:solidFill>
-                <a:schemeClr val="tx1"/>
-              </a:solidFill>
-              <a:latin typeface="Times New Roman"/>
-              <a:ea typeface="Calibri"/>
-              <a:cs typeface="Times New Roman"/>
-            </a:endParaRPr>
           </a:p>
         </p:txBody>
       </p:sp>
@@ -3400,8 +3256,8 @@
           </p:spPr>
         </p:pic>
       </p:grpSp>
-      <mc:AlternateContent xmlns:mc="http://schemas.openxmlformats.org/markup-compatibility/2006">
-        <mc:Choice xmlns:p14="http://schemas.microsoft.com/office/powerpoint/2010/main" Requires="p14">
+      <mc:AlternateContent xmlns:mc="http://schemas.openxmlformats.org/markup-compatibility/2006" xmlns:p14="http://schemas.microsoft.com/office/powerpoint/2010/main">
+        <mc:Choice Requires="p14">
           <p:contentPart p14:bwMode="auto" r:id="rId4">
             <p14:nvContentPartPr>
               <p14:cNvPr id="10" name="Ink 9">
@@ -3420,7 +3276,7 @@
             </p14:xfrm>
           </p:contentPart>
         </mc:Choice>
-        <mc:Fallback>
+        <mc:Fallback xmlns="">
           <p:pic>
             <p:nvPicPr>
               <p:cNvPr id="10" name="Ink 9">
@@ -3758,6 +3614,13 @@
             <a:schemeClr val="dk1"/>
           </a:fontRef>
         </p:style>
+        <p:txBody>
+          <a:bodyPr/>
+          <a:lstStyle/>
+          <a:p>
+            <a:endParaRPr lang="en-IN"/>
+          </a:p>
+        </p:txBody>
       </p:sp>
       <p:sp>
         <p:nvSpPr>
@@ -4060,6 +3923,13 @@
             </a:outerShdw>
           </a:effectLst>
         </p:spPr>
+        <p:txBody>
+          <a:bodyPr/>
+          <a:lstStyle/>
+          <a:p>
+            <a:endParaRPr lang="en-IN"/>
+          </a:p>
+        </p:txBody>
       </p:sp>
       <p:sp>
         <p:nvSpPr>
@@ -4358,6 +4228,13 @@
             </a:outerShdw>
           </a:effectLst>
         </p:spPr>
+        <p:txBody>
+          <a:bodyPr/>
+          <a:lstStyle/>
+          <a:p>
+            <a:endParaRPr lang="en-IN"/>
+          </a:p>
+        </p:txBody>
       </p:sp>
       <p:sp>
         <p:nvSpPr>
@@ -4660,6 +4537,13 @@
             </a:outerShdw>
           </a:effectLst>
         </p:spPr>
+        <p:txBody>
+          <a:bodyPr/>
+          <a:lstStyle/>
+          <a:p>
+            <a:endParaRPr lang="en-IN"/>
+          </a:p>
+        </p:txBody>
       </p:sp>
       <p:sp>
         <p:nvSpPr>
@@ -6270,6 +6154,13 @@
             </a:outerShdw>
           </a:effectLst>
         </p:spPr>
+        <p:txBody>
+          <a:bodyPr/>
+          <a:lstStyle/>
+          <a:p>
+            <a:endParaRPr lang="en-IN"/>
+          </a:p>
+        </p:txBody>
       </p:sp>
       <p:sp>
         <p:nvSpPr>
@@ -6434,6 +6325,13 @@
             <a:prstDash val="solid"/>
           </a:ln>
         </p:spPr>
+        <p:txBody>
+          <a:bodyPr/>
+          <a:lstStyle/>
+          <a:p>
+            <a:endParaRPr lang="en-IN"/>
+          </a:p>
+        </p:txBody>
       </p:sp>
       <p:sp>
         <p:nvSpPr>
@@ -6875,6 +6773,13 @@
             <a:prstDash val="solid"/>
           </a:ln>
         </p:spPr>
+        <p:txBody>
+          <a:bodyPr/>
+          <a:lstStyle/>
+          <a:p>
+            <a:endParaRPr lang="en-IN"/>
+          </a:p>
+        </p:txBody>
       </p:sp>
       <p:sp>
         <p:nvSpPr>
@@ -7302,6 +7207,13 @@
             <a:prstDash val="solid"/>
           </a:ln>
         </p:spPr>
+        <p:txBody>
+          <a:bodyPr/>
+          <a:lstStyle/>
+          <a:p>
+            <a:endParaRPr lang="en-IN"/>
+          </a:p>
+        </p:txBody>
       </p:sp>
       <p:sp>
         <p:nvSpPr>
@@ -7729,6 +7641,13 @@
             <a:prstDash val="solid"/>
           </a:ln>
         </p:spPr>
+        <p:txBody>
+          <a:bodyPr/>
+          <a:lstStyle/>
+          <a:p>
+            <a:endParaRPr lang="en-IN"/>
+          </a:p>
+        </p:txBody>
       </p:sp>
       <p:sp>
         <p:nvSpPr>
@@ -8156,6 +8075,13 @@
             <a:prstDash val="solid"/>
           </a:ln>
         </p:spPr>
+        <p:txBody>
+          <a:bodyPr/>
+          <a:lstStyle/>
+          <a:p>
+            <a:endParaRPr lang="en-IN"/>
+          </a:p>
+        </p:txBody>
       </p:sp>
       <p:sp>
         <p:nvSpPr>
@@ -10544,6 +10470,13 @@
             <a:prstDash val="solid"/>
           </a:ln>
         </p:spPr>
+        <p:txBody>
+          <a:bodyPr/>
+          <a:lstStyle/>
+          <a:p>
+            <a:endParaRPr lang="en-IN"/>
+          </a:p>
+        </p:txBody>
       </p:sp>
       <p:sp>
         <p:nvSpPr>
@@ -10575,6 +10508,13 @@
             <a:prstDash val="solid"/>
           </a:ln>
         </p:spPr>
+        <p:txBody>
+          <a:bodyPr/>
+          <a:lstStyle/>
+          <a:p>
+            <a:endParaRPr lang="en-IN"/>
+          </a:p>
+        </p:txBody>
       </p:sp>
       <p:sp>
         <p:nvSpPr>
@@ -11619,6 +11559,13 @@
             <a:prstDash val="solid"/>
           </a:ln>
         </p:spPr>
+        <p:txBody>
+          <a:bodyPr/>
+          <a:lstStyle/>
+          <a:p>
+            <a:endParaRPr lang="en-IN"/>
+          </a:p>
+        </p:txBody>
       </p:sp>
       <p:sp>
         <p:nvSpPr>
@@ -13541,6 +13488,13 @@
             <a:prstDash val="solid"/>
           </a:ln>
         </p:spPr>
+        <p:txBody>
+          <a:bodyPr/>
+          <a:lstStyle/>
+          <a:p>
+            <a:endParaRPr lang="en-IN"/>
+          </a:p>
+        </p:txBody>
       </p:sp>
       <p:sp>
         <p:nvSpPr>
@@ -13572,6 +13526,13 @@
             <a:prstDash val="solid"/>
           </a:ln>
         </p:spPr>
+        <p:txBody>
+          <a:bodyPr/>
+          <a:lstStyle/>
+          <a:p>
+            <a:endParaRPr lang="en-IN"/>
+          </a:p>
+        </p:txBody>
       </p:sp>
       <p:sp>
         <p:nvSpPr>
@@ -13603,6 +13564,13 @@
             <a:prstDash val="solid"/>
           </a:ln>
         </p:spPr>
+        <p:txBody>
+          <a:bodyPr/>
+          <a:lstStyle/>
+          <a:p>
+            <a:endParaRPr lang="en-IN"/>
+          </a:p>
+        </p:txBody>
       </p:sp>
       <p:sp>
         <p:nvSpPr>
@@ -13634,6 +13602,13 @@
             <a:prstDash val="solid"/>
           </a:ln>
         </p:spPr>
+        <p:txBody>
+          <a:bodyPr/>
+          <a:lstStyle/>
+          <a:p>
+            <a:endParaRPr lang="en-IN"/>
+          </a:p>
+        </p:txBody>
       </p:sp>
       <p:sp>
         <p:nvSpPr>
@@ -20051,6 +20026,13 @@
             </a:outerShdw>
           </a:effectLst>
         </p:spPr>
+        <p:txBody>
+          <a:bodyPr/>
+          <a:lstStyle/>
+          <a:p>
+            <a:endParaRPr lang="en-IN"/>
+          </a:p>
+        </p:txBody>
       </p:sp>
       <p:sp>
         <p:nvSpPr>
@@ -20359,6 +20341,13 @@
             </a:outerShdw>
           </a:effectLst>
         </p:spPr>
+        <p:txBody>
+          <a:bodyPr/>
+          <a:lstStyle/>
+          <a:p>
+            <a:endParaRPr lang="en-IN"/>
+          </a:p>
+        </p:txBody>
       </p:sp>
       <p:sp>
         <p:nvSpPr>
@@ -20667,6 +20656,13 @@
             </a:outerShdw>
           </a:effectLst>
         </p:spPr>
+        <p:txBody>
+          <a:bodyPr/>
+          <a:lstStyle/>
+          <a:p>
+            <a:endParaRPr lang="en-IN"/>
+          </a:p>
+        </p:txBody>
       </p:sp>
       <p:sp>
         <p:nvSpPr>
@@ -20975,6 +20971,13 @@
             </a:outerShdw>
           </a:effectLst>
         </p:spPr>
+        <p:txBody>
+          <a:bodyPr/>
+          <a:lstStyle/>
+          <a:p>
+            <a:endParaRPr lang="en-IN"/>
+          </a:p>
+        </p:txBody>
       </p:sp>
       <p:sp>
         <p:nvSpPr>
@@ -21283,6 +21286,13 @@
             </a:outerShdw>
           </a:effectLst>
         </p:spPr>
+        <p:txBody>
+          <a:bodyPr/>
+          <a:lstStyle/>
+          <a:p>
+            <a:endParaRPr lang="en-IN"/>
+          </a:p>
+        </p:txBody>
       </p:sp>
       <p:sp>
         <p:nvSpPr>
@@ -21591,6 +21601,13 @@
             </a:outerShdw>
           </a:effectLst>
         </p:spPr>
+        <p:txBody>
+          <a:bodyPr/>
+          <a:lstStyle/>
+          <a:p>
+            <a:endParaRPr lang="en-IN"/>
+          </a:p>
+        </p:txBody>
       </p:sp>
       <p:sp>
         <p:nvSpPr>
